--- a/public/fun/pack/pptx/familypro/가족소개프리미엄_07_아이와함께_피치코퍼.pptx
+++ b/public/fun/pack/pptx/familypro/가족소개프리미엄_07_아이와함께_피치코퍼.pptx
@@ -113,12 +113,12 @@
   <p:extLst>
     <p:ext uri="{521415D9-36F7-43E2-AB2F-B90AF26B5E84}">
       <p14:sectionLst xmlns:p14="http://schemas.microsoft.com/office/powerpoint/2010/main">
-        <p14:section name="시작" id="{C4F2DCCD-3448-47E5-8F4A-2572BFD888FF}">
+        <p14:section name="시작" id="{FE45164E-592E-474D-B033-505E7C1A46B9}">
           <p14:sldIdLst>
             <p14:sldId id="256"/>
           </p14:sldIdLst>
         </p14:section>
-        <p14:section name="본문" id="{C07CF058-5166-4DD2-9902-D508A86577A0}">
+        <p14:section name="본문" id="{998E3B96-F2CB-4D38-B7A6-7F67A47AD274}">
           <p14:sldIdLst>
             <p14:sldId id="257"/>
             <p14:sldId id="258"/>
@@ -127,7 +127,7 @@
             <p14:sldId id="261"/>
           </p14:sldIdLst>
         </p14:section>
-        <p14:section name="마무리" id="{7AA55C3A-EE4D-4EB6-A9BC-50FF2F0BA3A8}">
+        <p14:section name="마무리" id="{AC8DAE81-A566-447F-8C59-1968AA97B989}">
           <p14:sldIdLst>
             <p14:sldId id="262"/>
           </p14:sldIdLst>
@@ -1519,7 +1519,7 @@
             </a:lvl1pPr>
           </a:lstStyle>
           <a:p>
-            <a:fld id="{7D4C2A90-C0B9-4F4D-A8C1-EC4A82503B3B}" type="slidenum">
+            <a:fld id="{756E9D5A-7B70-4943-9CD4-7AA0DEDE44CA}" type="slidenum">
               <a:rPr lang="en-US"/>
               <a:t>‹#›</a:t>
             </a:fld>
@@ -2240,7 +2240,7 @@
             </a:lvl1pPr>
           </a:lstStyle>
           <a:p>
-            <a:fld id="{E4F72DE2-6D5B-44AC-A704-687A1BB75D67}" type="slidenum">
+            <a:fld id="{3E51D23D-F105-4CEC-B795-B7754DEAEE8A}" type="slidenum">
               <a:rPr lang="en-US"/>
               <a:t>‹#›</a:t>
             </a:fld>
@@ -2989,7 +2989,7 @@
             </a:lvl1pPr>
           </a:lstStyle>
           <a:p>
-            <a:fld id="{EE2489A4-E515-4086-95DF-801431FB137D}" type="slidenum">
+            <a:fld id="{87CB9B62-80A4-40B2-8F84-49C4CA6ADDE9}" type="slidenum">
               <a:rPr lang="en-US"/>
               <a:t>‹#›</a:t>
             </a:fld>
@@ -3896,7 +3896,7 @@
           <a:p>
             <a:r>
               <a:rPr lang="ko-KR"/>
-              <a:t>아이와 함께 · 0000. 00. 00</a:t>
+              <a:t>아이와 함께 · 날짜 입력</a:t>
             </a:r>
           </a:p>
         </p:txBody>
@@ -4279,7 +4279,7 @@
           <a:bodyPr/>
           <a:lstStyle/>
           <a:p>
-            <a:fld id="{9B4C53AD-BDE5-4813-B658-C5C26E7C9198}" type="slidenum">
+            <a:fld id="{A2E20887-7685-469E-A911-37191D5511E8}" type="slidenum">
               <a:rPr lang="en-US"/>
               <a:t>‹#›</a:t>
             </a:fld>
@@ -5017,7 +5017,7 @@
           <a:bodyPr/>
           <a:lstStyle/>
           <a:p>
-            <a:fld id="{0C85F084-C7E7-40B3-A28B-DAC3F1079188}" type="slidenum">
+            <a:fld id="{B769FEFC-02EF-4ED2-8A9F-6C4143EE118D}" type="slidenum">
               <a:rPr lang="en-US"/>
               <a:t>‹#›</a:t>
             </a:fld>
@@ -5881,7 +5881,7 @@
           <a:bodyPr/>
           <a:lstStyle/>
           <a:p>
-            <a:fld id="{EEBAD9AB-ABBA-4C49-8AE2-4F6903B9A68A}" type="slidenum">
+            <a:fld id="{05463E2F-0227-4687-BB8B-A3D955AEF807}" type="slidenum">
               <a:rPr lang="en-US"/>
               <a:t>‹#›</a:t>
             </a:fld>
@@ -7176,7 +7176,7 @@
           <a:bodyPr/>
           <a:lstStyle/>
           <a:p>
-            <a:fld id="{17BA36FC-4D23-469B-86F0-47AECDAAF5B9}" type="slidenum">
+            <a:fld id="{55AA2824-D4D8-4D50-880C-0935C024F311}" type="slidenum">
               <a:rPr lang="en-US"/>
               <a:t>‹#›</a:t>
             </a:fld>
@@ -7286,7 +7286,7 @@
           <a:bodyPr/>
           <a:lstStyle/>
           <a:p>
-            <a:fld id="{B17A86A3-4377-45BB-B1C1-D6DB807202EE}" type="slidenum">
+            <a:fld id="{84F1A4C9-2665-45FC-B1D6-3AB4C7C8C39C}" type="slidenum">
               <a:rPr lang="en-US"/>
               <a:t>‹#›</a:t>
             </a:fld>
